--- a/docs/pptx/whole/ritu-linsubhr-disc-grade3.pptx
+++ b/docs/pptx/whole/ritu-linsubhr-disc-grade3.pptx
@@ -2443,7 +2443,7 @@
           </p:nvSpPr>
           <p:spPr>
             <a:xfrm>
-              <a:off x="1942521" y="2073503"/>
+              <a:off x="1943067" y="2073503"/>
               <a:ext cx="0" cy="3649639"/>
             </a:xfrm>
             <a:custGeom>
@@ -2486,7 +2486,7 @@
           </p:nvSpPr>
           <p:spPr>
             <a:xfrm>
-              <a:off x="4460699" y="2073503"/>
+              <a:off x="4460487" y="2073503"/>
               <a:ext cx="0" cy="3649639"/>
             </a:xfrm>
             <a:custGeom>
@@ -2529,7 +2529,7 @@
           </p:nvSpPr>
           <p:spPr>
             <a:xfrm>
-              <a:off x="6978877" y="2073503"/>
+              <a:off x="6977907" y="2073503"/>
               <a:ext cx="0" cy="3649639"/>
             </a:xfrm>
             <a:custGeom>
@@ -2787,7 +2787,7 @@
           </p:nvSpPr>
           <p:spPr>
             <a:xfrm>
-              <a:off x="3201610" y="2073503"/>
+              <a:off x="3201777" y="2073503"/>
               <a:ext cx="0" cy="3649639"/>
             </a:xfrm>
             <a:custGeom>
@@ -2830,7 +2830,7 @@
           </p:nvSpPr>
           <p:spPr>
             <a:xfrm>
-              <a:off x="5719788" y="2073503"/>
+              <a:off x="5719197" y="2073503"/>
               <a:ext cx="0" cy="3649639"/>
             </a:xfrm>
             <a:custGeom>
@@ -2873,7 +2873,7 @@
           </p:nvSpPr>
           <p:spPr>
             <a:xfrm>
-              <a:off x="8237966" y="2073503"/>
+              <a:off x="8236616" y="2073503"/>
               <a:ext cx="0" cy="3649639"/>
             </a:xfrm>
             <a:custGeom>
@@ -2917,512 +2917,512 @@
           <p:spPr>
             <a:xfrm>
               <a:off x="1172049" y="2073503"/>
-              <a:ext cx="7090630" cy="3313730"/>
+              <a:ext cx="7090630" cy="3315591"/>
             </a:xfrm>
             <a:custGeom>
               <a:avLst/>
               <a:pathLst>
-                <a:path w="7090630" h="3313730">
+                <a:path w="7090630" h="3315591">
                   <a:moveTo>
-                    <a:pt x="2367230" y="0"/>
+                    <a:pt x="2400780" y="0"/>
                   </a:moveTo>
                   <a:lnTo>
-                    <a:pt x="2435165" y="148245"/>
-                  </a:lnTo>
-                  <a:lnTo>
-                    <a:pt x="2506788" y="297540"/>
-                  </a:lnTo>
-                  <a:lnTo>
-                    <a:pt x="2578410" y="440153"/>
-                  </a:lnTo>
-                  <a:lnTo>
-                    <a:pt x="2650033" y="576383"/>
-                  </a:lnTo>
-                  <a:lnTo>
-                    <a:pt x="2721655" y="706515"/>
-                  </a:lnTo>
-                  <a:lnTo>
-                    <a:pt x="2793278" y="830822"/>
-                  </a:lnTo>
-                  <a:lnTo>
-                    <a:pt x="2864901" y="949565"/>
-                  </a:lnTo>
-                  <a:lnTo>
-                    <a:pt x="2936523" y="1062994"/>
-                  </a:lnTo>
-                  <a:lnTo>
-                    <a:pt x="3008146" y="1171345"/>
-                  </a:lnTo>
-                  <a:lnTo>
-                    <a:pt x="3079768" y="1274847"/>
-                  </a:lnTo>
-                  <a:lnTo>
-                    <a:pt x="3151391" y="1373716"/>
-                  </a:lnTo>
-                  <a:lnTo>
-                    <a:pt x="3223013" y="1468160"/>
-                  </a:lnTo>
-                  <a:lnTo>
-                    <a:pt x="3294636" y="1558377"/>
-                  </a:lnTo>
-                  <a:lnTo>
-                    <a:pt x="3366258" y="1644555"/>
-                  </a:lnTo>
-                  <a:lnTo>
-                    <a:pt x="3437881" y="1726876"/>
-                  </a:lnTo>
-                  <a:lnTo>
-                    <a:pt x="3509503" y="1805513"/>
-                  </a:lnTo>
-                  <a:lnTo>
-                    <a:pt x="3581126" y="1880630"/>
-                  </a:lnTo>
-                  <a:lnTo>
-                    <a:pt x="3652748" y="1952384"/>
-                  </a:lnTo>
-                  <a:lnTo>
-                    <a:pt x="3724371" y="2020927"/>
-                  </a:lnTo>
-                  <a:lnTo>
-                    <a:pt x="3795993" y="2086402"/>
-                  </a:lnTo>
-                  <a:lnTo>
-                    <a:pt x="3867616" y="2148946"/>
-                  </a:lnTo>
-                  <a:lnTo>
-                    <a:pt x="3939238" y="2208691"/>
-                  </a:lnTo>
-                  <a:lnTo>
-                    <a:pt x="4010861" y="2265762"/>
-                  </a:lnTo>
-                  <a:lnTo>
-                    <a:pt x="4082483" y="2320278"/>
-                  </a:lnTo>
-                  <a:lnTo>
-                    <a:pt x="4154106" y="2372355"/>
-                  </a:lnTo>
-                  <a:lnTo>
-                    <a:pt x="4225729" y="2422100"/>
-                  </a:lnTo>
-                  <a:lnTo>
-                    <a:pt x="4297351" y="2469619"/>
-                  </a:lnTo>
-                  <a:lnTo>
-                    <a:pt x="4368974" y="2515010"/>
-                  </a:lnTo>
-                  <a:lnTo>
-                    <a:pt x="4440596" y="2558370"/>
-                  </a:lnTo>
-                  <a:lnTo>
-                    <a:pt x="4512219" y="2599790"/>
-                  </a:lnTo>
-                  <a:lnTo>
-                    <a:pt x="4583841" y="2639355"/>
-                  </a:lnTo>
-                  <a:lnTo>
-                    <a:pt x="4655464" y="2659868"/>
-                  </a:lnTo>
-                  <a:lnTo>
-                    <a:pt x="4727086" y="2668936"/>
-                  </a:lnTo>
-                  <a:lnTo>
-                    <a:pt x="4798709" y="2677904"/>
-                  </a:lnTo>
-                  <a:lnTo>
-                    <a:pt x="4870331" y="2686774"/>
-                  </a:lnTo>
-                  <a:lnTo>
-                    <a:pt x="4941954" y="2695546"/>
-                  </a:lnTo>
-                  <a:lnTo>
-                    <a:pt x="5013576" y="2704221"/>
-                  </a:lnTo>
-                  <a:lnTo>
-                    <a:pt x="5085199" y="2712801"/>
-                  </a:lnTo>
-                  <a:lnTo>
-                    <a:pt x="5156821" y="2721286"/>
-                  </a:lnTo>
-                  <a:lnTo>
-                    <a:pt x="5228444" y="2729678"/>
-                  </a:lnTo>
-                  <a:lnTo>
-                    <a:pt x="5300066" y="2737978"/>
-                  </a:lnTo>
-                  <a:lnTo>
-                    <a:pt x="5371689" y="2746186"/>
-                  </a:lnTo>
-                  <a:lnTo>
-                    <a:pt x="5443311" y="2754304"/>
-                  </a:lnTo>
-                  <a:lnTo>
-                    <a:pt x="5514934" y="2762332"/>
-                  </a:lnTo>
-                  <a:lnTo>
-                    <a:pt x="5586557" y="2770272"/>
-                  </a:lnTo>
-                  <a:lnTo>
-                    <a:pt x="5658179" y="2778125"/>
-                  </a:lnTo>
-                  <a:lnTo>
-                    <a:pt x="5729802" y="2785892"/>
-                  </a:lnTo>
-                  <a:lnTo>
-                    <a:pt x="5801424" y="2793572"/>
-                  </a:lnTo>
-                  <a:lnTo>
-                    <a:pt x="5873047" y="2801169"/>
-                  </a:lnTo>
-                  <a:lnTo>
-                    <a:pt x="5944669" y="2808682"/>
-                  </a:lnTo>
-                  <a:lnTo>
-                    <a:pt x="6016292" y="2816112"/>
-                  </a:lnTo>
-                  <a:lnTo>
-                    <a:pt x="6087914" y="2823460"/>
-                  </a:lnTo>
-                  <a:lnTo>
-                    <a:pt x="6159537" y="2830727"/>
-                  </a:lnTo>
-                  <a:lnTo>
-                    <a:pt x="6231159" y="2837915"/>
-                  </a:lnTo>
-                  <a:lnTo>
-                    <a:pt x="6302782" y="2845023"/>
-                  </a:lnTo>
-                  <a:lnTo>
-                    <a:pt x="6374404" y="2852053"/>
-                  </a:lnTo>
-                  <a:lnTo>
-                    <a:pt x="6446027" y="2859006"/>
-                  </a:lnTo>
-                  <a:lnTo>
-                    <a:pt x="6517649" y="2865882"/>
-                  </a:lnTo>
-                  <a:lnTo>
-                    <a:pt x="6589272" y="2872682"/>
-                  </a:lnTo>
-                  <a:lnTo>
-                    <a:pt x="6660894" y="2879408"/>
-                  </a:lnTo>
-                  <a:lnTo>
-                    <a:pt x="6732517" y="2886060"/>
-                  </a:lnTo>
-                  <a:lnTo>
-                    <a:pt x="6804139" y="2892638"/>
-                  </a:lnTo>
-                  <a:lnTo>
-                    <a:pt x="6875762" y="2899144"/>
-                  </a:lnTo>
-                  <a:lnTo>
-                    <a:pt x="6947385" y="2905578"/>
-                  </a:lnTo>
-                  <a:lnTo>
-                    <a:pt x="7019007" y="2911942"/>
-                  </a:lnTo>
-                  <a:lnTo>
-                    <a:pt x="7090630" y="2918235"/>
-                  </a:lnTo>
-                  <a:lnTo>
-                    <a:pt x="7090630" y="3313730"/>
-                  </a:lnTo>
-                  <a:lnTo>
-                    <a:pt x="7019007" y="3305764"/>
-                  </a:lnTo>
-                  <a:lnTo>
-                    <a:pt x="6947385" y="3297424"/>
-                  </a:lnTo>
-                  <a:lnTo>
-                    <a:pt x="6875762" y="3288694"/>
-                  </a:lnTo>
-                  <a:lnTo>
-                    <a:pt x="6804139" y="3279554"/>
-                  </a:lnTo>
-                  <a:lnTo>
-                    <a:pt x="6732517" y="3269986"/>
-                  </a:lnTo>
-                  <a:lnTo>
-                    <a:pt x="6660894" y="3259970"/>
-                  </a:lnTo>
-                  <a:lnTo>
-                    <a:pt x="6589272" y="3249485"/>
-                  </a:lnTo>
-                  <a:lnTo>
-                    <a:pt x="6517649" y="3238508"/>
-                  </a:lnTo>
-                  <a:lnTo>
-                    <a:pt x="6446027" y="3227017"/>
-                  </a:lnTo>
-                  <a:lnTo>
-                    <a:pt x="6374404" y="3214988"/>
-                  </a:lnTo>
-                  <a:lnTo>
-                    <a:pt x="6302782" y="3202394"/>
-                  </a:lnTo>
-                  <a:lnTo>
-                    <a:pt x="6231159" y="3189211"/>
-                  </a:lnTo>
-                  <a:lnTo>
-                    <a:pt x="6159537" y="3175410"/>
-                  </a:lnTo>
-                  <a:lnTo>
-                    <a:pt x="6087914" y="3160963"/>
-                  </a:lnTo>
-                  <a:lnTo>
-                    <a:pt x="6016292" y="3145838"/>
-                  </a:lnTo>
-                  <a:lnTo>
-                    <a:pt x="5944669" y="3130005"/>
-                  </a:lnTo>
-                  <a:lnTo>
-                    <a:pt x="5873047" y="3113430"/>
-                  </a:lnTo>
-                  <a:lnTo>
-                    <a:pt x="5801424" y="3096078"/>
-                  </a:lnTo>
-                  <a:lnTo>
-                    <a:pt x="5729802" y="3077913"/>
-                  </a:lnTo>
-                  <a:lnTo>
-                    <a:pt x="5658179" y="3058897"/>
-                  </a:lnTo>
-                  <a:lnTo>
-                    <a:pt x="5586557" y="3038990"/>
-                  </a:lnTo>
-                  <a:lnTo>
-                    <a:pt x="5514934" y="3018150"/>
-                  </a:lnTo>
-                  <a:lnTo>
-                    <a:pt x="5443311" y="2996334"/>
-                  </a:lnTo>
-                  <a:lnTo>
-                    <a:pt x="5371689" y="2973495"/>
-                  </a:lnTo>
-                  <a:lnTo>
-                    <a:pt x="5300066" y="2949586"/>
-                  </a:lnTo>
-                  <a:lnTo>
-                    <a:pt x="5228444" y="2924557"/>
-                  </a:lnTo>
-                  <a:lnTo>
-                    <a:pt x="5156821" y="2898356"/>
-                  </a:lnTo>
-                  <a:lnTo>
-                    <a:pt x="5085199" y="2870926"/>
-                  </a:lnTo>
-                  <a:lnTo>
-                    <a:pt x="5013576" y="2842212"/>
-                  </a:lnTo>
-                  <a:lnTo>
-                    <a:pt x="4941954" y="2812151"/>
-                  </a:lnTo>
-                  <a:lnTo>
-                    <a:pt x="4870331" y="2780683"/>
-                  </a:lnTo>
-                  <a:lnTo>
-                    <a:pt x="4798709" y="2747739"/>
-                  </a:lnTo>
-                  <a:lnTo>
-                    <a:pt x="4727086" y="2713252"/>
-                  </a:lnTo>
-                  <a:lnTo>
-                    <a:pt x="4655464" y="2677150"/>
-                  </a:lnTo>
-                  <a:lnTo>
-                    <a:pt x="4583841" y="2650699"/>
-                  </a:lnTo>
-                  <a:lnTo>
-                    <a:pt x="4512219" y="2641428"/>
-                  </a:lnTo>
-                  <a:lnTo>
-                    <a:pt x="4440596" y="2632054"/>
-                  </a:lnTo>
-                  <a:lnTo>
-                    <a:pt x="4368974" y="2622576"/>
-                  </a:lnTo>
-                  <a:lnTo>
-                    <a:pt x="4297351" y="2612992"/>
-                  </a:lnTo>
-                  <a:lnTo>
-                    <a:pt x="4225729" y="2603302"/>
-                  </a:lnTo>
-                  <a:lnTo>
-                    <a:pt x="4154106" y="2593503"/>
-                  </a:lnTo>
-                  <a:lnTo>
-                    <a:pt x="4082483" y="2583596"/>
-                  </a:lnTo>
-                  <a:lnTo>
-                    <a:pt x="4010861" y="2573578"/>
-                  </a:lnTo>
-                  <a:lnTo>
-                    <a:pt x="3939238" y="2563449"/>
-                  </a:lnTo>
-                  <a:lnTo>
-                    <a:pt x="3867616" y="2553207"/>
-                  </a:lnTo>
-                  <a:lnTo>
-                    <a:pt x="3795993" y="2542851"/>
-                  </a:lnTo>
-                  <a:lnTo>
-                    <a:pt x="3724371" y="2532380"/>
-                  </a:lnTo>
-                  <a:lnTo>
-                    <a:pt x="3652748" y="2521792"/>
-                  </a:lnTo>
-                  <a:lnTo>
-                    <a:pt x="3581126" y="2511087"/>
-                  </a:lnTo>
-                  <a:lnTo>
-                    <a:pt x="3509503" y="2500262"/>
-                  </a:lnTo>
-                  <a:lnTo>
-                    <a:pt x="3437881" y="2489317"/>
-                  </a:lnTo>
-                  <a:lnTo>
-                    <a:pt x="3366258" y="2478250"/>
-                  </a:lnTo>
-                  <a:lnTo>
-                    <a:pt x="3294636" y="2467060"/>
-                  </a:lnTo>
-                  <a:lnTo>
-                    <a:pt x="3223013" y="2455745"/>
-                  </a:lnTo>
-                  <a:lnTo>
-                    <a:pt x="3151391" y="2444305"/>
-                  </a:lnTo>
-                  <a:lnTo>
-                    <a:pt x="3079768" y="2432737"/>
-                  </a:lnTo>
-                  <a:lnTo>
-                    <a:pt x="3008146" y="2421040"/>
-                  </a:lnTo>
-                  <a:lnTo>
-                    <a:pt x="2936523" y="2409214"/>
-                  </a:lnTo>
-                  <a:lnTo>
-                    <a:pt x="2864901" y="2397255"/>
-                  </a:lnTo>
-                  <a:lnTo>
-                    <a:pt x="2793278" y="2385164"/>
-                  </a:lnTo>
-                  <a:lnTo>
-                    <a:pt x="2721655" y="2372938"/>
-                  </a:lnTo>
-                  <a:lnTo>
-                    <a:pt x="2650033" y="2360576"/>
-                  </a:lnTo>
-                  <a:lnTo>
-                    <a:pt x="2578410" y="2348076"/>
-                  </a:lnTo>
-                  <a:lnTo>
-                    <a:pt x="2506788" y="2335437"/>
-                  </a:lnTo>
-                  <a:lnTo>
-                    <a:pt x="2435165" y="2322658"/>
-                  </a:lnTo>
-                  <a:lnTo>
-                    <a:pt x="2363543" y="2309736"/>
-                  </a:lnTo>
-                  <a:lnTo>
-                    <a:pt x="2291920" y="2296671"/>
-                  </a:lnTo>
-                  <a:lnTo>
-                    <a:pt x="2220298" y="2283460"/>
-                  </a:lnTo>
-                  <a:lnTo>
-                    <a:pt x="2148675" y="2270102"/>
-                  </a:lnTo>
-                  <a:lnTo>
-                    <a:pt x="2077053" y="2256595"/>
-                  </a:lnTo>
-                  <a:lnTo>
-                    <a:pt x="2005430" y="2242938"/>
-                  </a:lnTo>
-                  <a:lnTo>
-                    <a:pt x="1933808" y="2229130"/>
-                  </a:lnTo>
-                  <a:lnTo>
-                    <a:pt x="1862185" y="2215167"/>
-                  </a:lnTo>
-                  <a:lnTo>
-                    <a:pt x="1790563" y="2201049"/>
-                  </a:lnTo>
-                  <a:lnTo>
-                    <a:pt x="1718940" y="2186774"/>
-                  </a:lnTo>
-                  <a:lnTo>
-                    <a:pt x="1647318" y="2172340"/>
-                  </a:lnTo>
-                  <a:lnTo>
-                    <a:pt x="1575695" y="2157746"/>
-                  </a:lnTo>
-                  <a:lnTo>
-                    <a:pt x="1504073" y="2142989"/>
-                  </a:lnTo>
-                  <a:lnTo>
-                    <a:pt x="1432450" y="2128068"/>
-                  </a:lnTo>
-                  <a:lnTo>
-                    <a:pt x="1360827" y="2112980"/>
-                  </a:lnTo>
-                  <a:lnTo>
-                    <a:pt x="1289205" y="2097725"/>
-                  </a:lnTo>
-                  <a:lnTo>
-                    <a:pt x="1217582" y="2082300"/>
-                  </a:lnTo>
-                  <a:lnTo>
-                    <a:pt x="1145960" y="2066704"/>
-                  </a:lnTo>
-                  <a:lnTo>
-                    <a:pt x="1074337" y="2050934"/>
-                  </a:lnTo>
-                  <a:lnTo>
-                    <a:pt x="1002715" y="2034988"/>
-                  </a:lnTo>
-                  <a:lnTo>
-                    <a:pt x="931092" y="2018865"/>
-                  </a:lnTo>
-                  <a:lnTo>
-                    <a:pt x="859470" y="2002562"/>
-                  </a:lnTo>
-                  <a:lnTo>
-                    <a:pt x="787847" y="1986078"/>
-                  </a:lnTo>
-                  <a:lnTo>
-                    <a:pt x="716225" y="1969411"/>
-                  </a:lnTo>
-                  <a:lnTo>
-                    <a:pt x="644602" y="1952558"/>
-                  </a:lnTo>
-                  <a:lnTo>
-                    <a:pt x="572980" y="1935517"/>
-                  </a:lnTo>
-                  <a:lnTo>
-                    <a:pt x="501357" y="1918287"/>
-                  </a:lnTo>
-                  <a:lnTo>
-                    <a:pt x="429735" y="1900865"/>
-                  </a:lnTo>
-                  <a:lnTo>
-                    <a:pt x="358112" y="1883250"/>
-                  </a:lnTo>
-                  <a:lnTo>
-                    <a:pt x="286490" y="1865438"/>
-                  </a:lnTo>
-                  <a:lnTo>
-                    <a:pt x="214867" y="1847428"/>
-                  </a:lnTo>
-                  <a:lnTo>
-                    <a:pt x="143245" y="1829218"/>
-                  </a:lnTo>
-                  <a:lnTo>
-                    <a:pt x="71622" y="1810804"/>
-                  </a:lnTo>
-                  <a:lnTo>
-                    <a:pt x="0" y="1792186"/>
+                    <a:pt x="2435165" y="77468"/>
+                  </a:lnTo>
+                  <a:lnTo>
+                    <a:pt x="2506788" y="231532"/>
+                  </a:lnTo>
+                  <a:lnTo>
+                    <a:pt x="2578410" y="378629"/>
+                  </a:lnTo>
+                  <a:lnTo>
+                    <a:pt x="2650033" y="519072"/>
+                  </a:lnTo>
+                  <a:lnTo>
+                    <a:pt x="2721655" y="653163"/>
+                  </a:lnTo>
+                  <a:lnTo>
+                    <a:pt x="2793278" y="781189"/>
+                  </a:lnTo>
+                  <a:lnTo>
+                    <a:pt x="2864901" y="903425"/>
+                  </a:lnTo>
+                  <a:lnTo>
+                    <a:pt x="2936523" y="1020132"/>
+                  </a:lnTo>
+                  <a:lnTo>
+                    <a:pt x="3008146" y="1131560"/>
+                  </a:lnTo>
+                  <a:lnTo>
+                    <a:pt x="3079768" y="1237949"/>
+                  </a:lnTo>
+                  <a:lnTo>
+                    <a:pt x="3151391" y="1339525"/>
+                  </a:lnTo>
+                  <a:lnTo>
+                    <a:pt x="3223013" y="1436507"/>
+                  </a:lnTo>
+                  <a:lnTo>
+                    <a:pt x="3294636" y="1529103"/>
+                  </a:lnTo>
+                  <a:lnTo>
+                    <a:pt x="3366258" y="1617511"/>
+                  </a:lnTo>
+                  <a:lnTo>
+                    <a:pt x="3437881" y="1701920"/>
+                  </a:lnTo>
+                  <a:lnTo>
+                    <a:pt x="3509503" y="1782511"/>
+                  </a:lnTo>
+                  <a:lnTo>
+                    <a:pt x="3581126" y="1859458"/>
+                  </a:lnTo>
+                  <a:lnTo>
+                    <a:pt x="3652748" y="1932924"/>
+                  </a:lnTo>
+                  <a:lnTo>
+                    <a:pt x="3724371" y="2003067"/>
+                  </a:lnTo>
+                  <a:lnTo>
+                    <a:pt x="3795993" y="2070037"/>
+                  </a:lnTo>
+                  <a:lnTo>
+                    <a:pt x="3867616" y="2133979"/>
+                  </a:lnTo>
+                  <a:lnTo>
+                    <a:pt x="3939238" y="2195028"/>
+                  </a:lnTo>
+                  <a:lnTo>
+                    <a:pt x="4010861" y="2253317"/>
+                  </a:lnTo>
+                  <a:lnTo>
+                    <a:pt x="4082483" y="2308968"/>
+                  </a:lnTo>
+                  <a:lnTo>
+                    <a:pt x="4154106" y="2362103"/>
+                  </a:lnTo>
+                  <a:lnTo>
+                    <a:pt x="4225729" y="2412835"/>
+                  </a:lnTo>
+                  <a:lnTo>
+                    <a:pt x="4297351" y="2461272"/>
+                  </a:lnTo>
+                  <a:lnTo>
+                    <a:pt x="4368974" y="2507518"/>
+                  </a:lnTo>
+                  <a:lnTo>
+                    <a:pt x="4440596" y="2551672"/>
+                  </a:lnTo>
+                  <a:lnTo>
+                    <a:pt x="4512219" y="2593829"/>
+                  </a:lnTo>
+                  <a:lnTo>
+                    <a:pt x="4583841" y="2634080"/>
+                  </a:lnTo>
+                  <a:lnTo>
+                    <a:pt x="4655464" y="2658773"/>
+                  </a:lnTo>
+                  <a:lnTo>
+                    <a:pt x="4727086" y="2668047"/>
+                  </a:lnTo>
+                  <a:lnTo>
+                    <a:pt x="4798709" y="2677217"/>
+                  </a:lnTo>
+                  <a:lnTo>
+                    <a:pt x="4870331" y="2686284"/>
+                  </a:lnTo>
+                  <a:lnTo>
+                    <a:pt x="4941954" y="2695249"/>
+                  </a:lnTo>
+                  <a:lnTo>
+                    <a:pt x="5013576" y="2704113"/>
+                  </a:lnTo>
+                  <a:lnTo>
+                    <a:pt x="5085199" y="2712877"/>
+                  </a:lnTo>
+                  <a:lnTo>
+                    <a:pt x="5156821" y="2721543"/>
+                  </a:lnTo>
+                  <a:lnTo>
+                    <a:pt x="5228444" y="2730112"/>
+                  </a:lnTo>
+                  <a:lnTo>
+                    <a:pt x="5300066" y="2738584"/>
+                  </a:lnTo>
+                  <a:lnTo>
+                    <a:pt x="5371689" y="2746961"/>
+                  </a:lnTo>
+                  <a:lnTo>
+                    <a:pt x="5443311" y="2755244"/>
+                  </a:lnTo>
+                  <a:lnTo>
+                    <a:pt x="5514934" y="2763434"/>
+                  </a:lnTo>
+                  <a:lnTo>
+                    <a:pt x="5586557" y="2771531"/>
+                  </a:lnTo>
+                  <a:lnTo>
+                    <a:pt x="5658179" y="2779538"/>
+                  </a:lnTo>
+                  <a:lnTo>
+                    <a:pt x="5729802" y="2787454"/>
+                  </a:lnTo>
+                  <a:lnTo>
+                    <a:pt x="5801424" y="2795282"/>
+                  </a:lnTo>
+                  <a:lnTo>
+                    <a:pt x="5873047" y="2803022"/>
+                  </a:lnTo>
+                  <a:lnTo>
+                    <a:pt x="5944669" y="2810674"/>
+                  </a:lnTo>
+                  <a:lnTo>
+                    <a:pt x="6016292" y="2818241"/>
+                  </a:lnTo>
+                  <a:lnTo>
+                    <a:pt x="6087914" y="2825722"/>
+                  </a:lnTo>
+                  <a:lnTo>
+                    <a:pt x="6159537" y="2833120"/>
+                  </a:lnTo>
+                  <a:lnTo>
+                    <a:pt x="6231159" y="2840434"/>
+                  </a:lnTo>
+                  <a:lnTo>
+                    <a:pt x="6302782" y="2847666"/>
+                  </a:lnTo>
+                  <a:lnTo>
+                    <a:pt x="6374404" y="2854817"/>
+                  </a:lnTo>
+                  <a:lnTo>
+                    <a:pt x="6446027" y="2861887"/>
+                  </a:lnTo>
+                  <a:lnTo>
+                    <a:pt x="6517649" y="2868878"/>
+                  </a:lnTo>
+                  <a:lnTo>
+                    <a:pt x="6589272" y="2875790"/>
+                  </a:lnTo>
+                  <a:lnTo>
+                    <a:pt x="6660894" y="2882625"/>
+                  </a:lnTo>
+                  <a:lnTo>
+                    <a:pt x="6732517" y="2889382"/>
+                  </a:lnTo>
+                  <a:lnTo>
+                    <a:pt x="6804139" y="2896064"/>
+                  </a:lnTo>
+                  <a:lnTo>
+                    <a:pt x="6875762" y="2902671"/>
+                  </a:lnTo>
+                  <a:lnTo>
+                    <a:pt x="6947385" y="2909203"/>
+                  </a:lnTo>
+                  <a:lnTo>
+                    <a:pt x="7019007" y="2915662"/>
+                  </a:lnTo>
+                  <a:lnTo>
+                    <a:pt x="7090630" y="2922048"/>
+                  </a:lnTo>
+                  <a:lnTo>
+                    <a:pt x="7090630" y="3315591"/>
+                  </a:lnTo>
+                  <a:lnTo>
+                    <a:pt x="7019007" y="3307625"/>
+                  </a:lnTo>
+                  <a:lnTo>
+                    <a:pt x="6947385" y="3299282"/>
+                  </a:lnTo>
+                  <a:lnTo>
+                    <a:pt x="6875762" y="3290543"/>
+                  </a:lnTo>
+                  <a:lnTo>
+                    <a:pt x="6804139" y="3281391"/>
+                  </a:lnTo>
+                  <a:lnTo>
+                    <a:pt x="6732517" y="3271805"/>
+                  </a:lnTo>
+                  <a:lnTo>
+                    <a:pt x="6660894" y="3261764"/>
+                  </a:lnTo>
+                  <a:lnTo>
+                    <a:pt x="6589272" y="3251249"/>
+                  </a:lnTo>
+                  <a:lnTo>
+                    <a:pt x="6517649" y="3240235"/>
+                  </a:lnTo>
+                  <a:lnTo>
+                    <a:pt x="6446027" y="3228699"/>
+                  </a:lnTo>
+                  <a:lnTo>
+                    <a:pt x="6374404" y="3216617"/>
+                  </a:lnTo>
+                  <a:lnTo>
+                    <a:pt x="6302782" y="3203962"/>
+                  </a:lnTo>
+                  <a:lnTo>
+                    <a:pt x="6231159" y="3190708"/>
+                  </a:lnTo>
+                  <a:lnTo>
+                    <a:pt x="6159537" y="3176826"/>
+                  </a:lnTo>
+                  <a:lnTo>
+                    <a:pt x="6087914" y="3162287"/>
+                  </a:lnTo>
+                  <a:lnTo>
+                    <a:pt x="6016292" y="3147059"/>
+                  </a:lnTo>
+                  <a:lnTo>
+                    <a:pt x="5944669" y="3131109"/>
+                  </a:lnTo>
+                  <a:lnTo>
+                    <a:pt x="5873047" y="3114404"/>
+                  </a:lnTo>
+                  <a:lnTo>
+                    <a:pt x="5801424" y="3096907"/>
+                  </a:lnTo>
+                  <a:lnTo>
+                    <a:pt x="5729802" y="3078582"/>
+                  </a:lnTo>
+                  <a:lnTo>
+                    <a:pt x="5658179" y="3059388"/>
+                  </a:lnTo>
+                  <a:lnTo>
+                    <a:pt x="5586557" y="3039285"/>
+                  </a:lnTo>
+                  <a:lnTo>
+                    <a:pt x="5514934" y="3018230"/>
+                  </a:lnTo>
+                  <a:lnTo>
+                    <a:pt x="5443311" y="2996178"/>
+                  </a:lnTo>
+                  <a:lnTo>
+                    <a:pt x="5371689" y="2973081"/>
+                  </a:lnTo>
+                  <a:lnTo>
+                    <a:pt x="5300066" y="2948889"/>
+                  </a:lnTo>
+                  <a:lnTo>
+                    <a:pt x="5228444" y="2923552"/>
+                  </a:lnTo>
+                  <a:lnTo>
+                    <a:pt x="5156821" y="2897014"/>
+                  </a:lnTo>
+                  <a:lnTo>
+                    <a:pt x="5085199" y="2869219"/>
+                  </a:lnTo>
+                  <a:lnTo>
+                    <a:pt x="5013576" y="2840108"/>
+                  </a:lnTo>
+                  <a:lnTo>
+                    <a:pt x="4941954" y="2809617"/>
+                  </a:lnTo>
+                  <a:lnTo>
+                    <a:pt x="4870331" y="2777682"/>
+                  </a:lnTo>
+                  <a:lnTo>
+                    <a:pt x="4798709" y="2744234"/>
+                  </a:lnTo>
+                  <a:lnTo>
+                    <a:pt x="4727086" y="2709202"/>
+                  </a:lnTo>
+                  <a:lnTo>
+                    <a:pt x="4655464" y="2672510"/>
+                  </a:lnTo>
+                  <a:lnTo>
+                    <a:pt x="4583841" y="2649393"/>
+                  </a:lnTo>
+                  <a:lnTo>
+                    <a:pt x="4512219" y="2639907"/>
+                  </a:lnTo>
+                  <a:lnTo>
+                    <a:pt x="4440596" y="2630312"/>
+                  </a:lnTo>
+                  <a:lnTo>
+                    <a:pt x="4368974" y="2620609"/>
+                  </a:lnTo>
+                  <a:lnTo>
+                    <a:pt x="4297351" y="2610796"/>
+                  </a:lnTo>
+                  <a:lnTo>
+                    <a:pt x="4225729" y="2600870"/>
+                  </a:lnTo>
+                  <a:lnTo>
+                    <a:pt x="4154106" y="2590832"/>
+                  </a:lnTo>
+                  <a:lnTo>
+                    <a:pt x="4082483" y="2580680"/>
+                  </a:lnTo>
+                  <a:lnTo>
+                    <a:pt x="4010861" y="2570413"/>
+                  </a:lnTo>
+                  <a:lnTo>
+                    <a:pt x="3939238" y="2560028"/>
+                  </a:lnTo>
+                  <a:lnTo>
+                    <a:pt x="3867616" y="2549526"/>
+                  </a:lnTo>
+                  <a:lnTo>
+                    <a:pt x="3795993" y="2538904"/>
+                  </a:lnTo>
+                  <a:lnTo>
+                    <a:pt x="3724371" y="2528162"/>
+                  </a:lnTo>
+                  <a:lnTo>
+                    <a:pt x="3652748" y="2517297"/>
+                  </a:lnTo>
+                  <a:lnTo>
+                    <a:pt x="3581126" y="2506309"/>
+                  </a:lnTo>
+                  <a:lnTo>
+                    <a:pt x="3509503" y="2495196"/>
+                  </a:lnTo>
+                  <a:lnTo>
+                    <a:pt x="3437881" y="2483956"/>
+                  </a:lnTo>
+                  <a:lnTo>
+                    <a:pt x="3366258" y="2472589"/>
+                  </a:lnTo>
+                  <a:lnTo>
+                    <a:pt x="3294636" y="2461092"/>
+                  </a:lnTo>
+                  <a:lnTo>
+                    <a:pt x="3223013" y="2449465"/>
+                  </a:lnTo>
+                  <a:lnTo>
+                    <a:pt x="3151391" y="2437706"/>
+                  </a:lnTo>
+                  <a:lnTo>
+                    <a:pt x="3079768" y="2425813"/>
+                  </a:lnTo>
+                  <a:lnTo>
+                    <a:pt x="3008146" y="2413784"/>
+                  </a:lnTo>
+                  <a:lnTo>
+                    <a:pt x="2936523" y="2401619"/>
+                  </a:lnTo>
+                  <a:lnTo>
+                    <a:pt x="2864901" y="2389316"/>
+                  </a:lnTo>
+                  <a:lnTo>
+                    <a:pt x="2793278" y="2376873"/>
+                  </a:lnTo>
+                  <a:lnTo>
+                    <a:pt x="2721655" y="2364288"/>
+                  </a:lnTo>
+                  <a:lnTo>
+                    <a:pt x="2650033" y="2351560"/>
+                  </a:lnTo>
+                  <a:lnTo>
+                    <a:pt x="2578410" y="2338687"/>
+                  </a:lnTo>
+                  <a:lnTo>
+                    <a:pt x="2506788" y="2325668"/>
+                  </a:lnTo>
+                  <a:lnTo>
+                    <a:pt x="2435165" y="2312501"/>
+                  </a:lnTo>
+                  <a:lnTo>
+                    <a:pt x="2363543" y="2299185"/>
+                  </a:lnTo>
+                  <a:lnTo>
+                    <a:pt x="2291920" y="2285717"/>
+                  </a:lnTo>
+                  <a:lnTo>
+                    <a:pt x="2220298" y="2272096"/>
+                  </a:lnTo>
+                  <a:lnTo>
+                    <a:pt x="2148675" y="2258319"/>
+                  </a:lnTo>
+                  <a:lnTo>
+                    <a:pt x="2077053" y="2244387"/>
+                  </a:lnTo>
+                  <a:lnTo>
+                    <a:pt x="2005430" y="2230296"/>
+                  </a:lnTo>
+                  <a:lnTo>
+                    <a:pt x="1933808" y="2216044"/>
+                  </a:lnTo>
+                  <a:lnTo>
+                    <a:pt x="1862185" y="2201631"/>
+                  </a:lnTo>
+                  <a:lnTo>
+                    <a:pt x="1790563" y="2187054"/>
+                  </a:lnTo>
+                  <a:lnTo>
+                    <a:pt x="1718940" y="2172311"/>
+                  </a:lnTo>
+                  <a:lnTo>
+                    <a:pt x="1647318" y="2157400"/>
+                  </a:lnTo>
+                  <a:lnTo>
+                    <a:pt x="1575695" y="2142320"/>
+                  </a:lnTo>
+                  <a:lnTo>
+                    <a:pt x="1504073" y="2127069"/>
+                  </a:lnTo>
+                  <a:lnTo>
+                    <a:pt x="1432450" y="2111644"/>
+                  </a:lnTo>
+                  <a:lnTo>
+                    <a:pt x="1360827" y="2096043"/>
+                  </a:lnTo>
+                  <a:lnTo>
+                    <a:pt x="1289205" y="2080266"/>
+                  </a:lnTo>
+                  <a:lnTo>
+                    <a:pt x="1217582" y="2064308"/>
+                  </a:lnTo>
+                  <a:lnTo>
+                    <a:pt x="1145960" y="2048170"/>
+                  </a:lnTo>
+                  <a:lnTo>
+                    <a:pt x="1074337" y="2031848"/>
+                  </a:lnTo>
+                  <a:lnTo>
+                    <a:pt x="1002715" y="2015340"/>
+                  </a:lnTo>
+                  <a:lnTo>
+                    <a:pt x="931092" y="1998645"/>
+                  </a:lnTo>
+                  <a:lnTo>
+                    <a:pt x="859470" y="1981760"/>
+                  </a:lnTo>
+                  <a:lnTo>
+                    <a:pt x="787847" y="1964683"/>
+                  </a:lnTo>
+                  <a:lnTo>
+                    <a:pt x="716225" y="1947412"/>
+                  </a:lnTo>
+                  <a:lnTo>
+                    <a:pt x="644602" y="1929944"/>
+                  </a:lnTo>
+                  <a:lnTo>
+                    <a:pt x="572980" y="1912278"/>
+                  </a:lnTo>
+                  <a:lnTo>
+                    <a:pt x="501357" y="1894411"/>
+                  </a:lnTo>
+                  <a:lnTo>
+                    <a:pt x="429735" y="1876341"/>
+                  </a:lnTo>
+                  <a:lnTo>
+                    <a:pt x="358112" y="1858065"/>
+                  </a:lnTo>
+                  <a:lnTo>
+                    <a:pt x="286490" y="1839581"/>
+                  </a:lnTo>
+                  <a:lnTo>
+                    <a:pt x="214867" y="1820888"/>
+                  </a:lnTo>
+                  <a:lnTo>
+                    <a:pt x="143245" y="1801982"/>
+                  </a:lnTo>
+                  <a:lnTo>
+                    <a:pt x="71622" y="1782861"/>
+                  </a:lnTo>
+                  <a:lnTo>
+                    <a:pt x="0" y="1763522"/>
                   </a:lnTo>
                   <a:close/>
                 </a:path>
@@ -3448,213 +3448,213 @@
           </p:nvSpPr>
           <p:spPr>
             <a:xfrm>
-              <a:off x="3539279" y="2073503"/>
-              <a:ext cx="4723400" cy="2918235"/>
+              <a:off x="3572830" y="2073503"/>
+              <a:ext cx="4689849" cy="2922048"/>
             </a:xfrm>
             <a:custGeom>
               <a:avLst/>
               <a:pathLst>
-                <a:path w="4723400" h="2918235">
+                <a:path w="4689849" h="2922048">
                   <a:moveTo>
                     <a:pt x="0" y="0"/>
                   </a:moveTo>
                   <a:lnTo>
-                    <a:pt x="67935" y="148245"/>
-                  </a:lnTo>
-                  <a:lnTo>
-                    <a:pt x="139558" y="297540"/>
-                  </a:lnTo>
-                  <a:lnTo>
-                    <a:pt x="211180" y="440153"/>
-                  </a:lnTo>
-                  <a:lnTo>
-                    <a:pt x="282803" y="576383"/>
-                  </a:lnTo>
-                  <a:lnTo>
-                    <a:pt x="354425" y="706515"/>
-                  </a:lnTo>
-                  <a:lnTo>
-                    <a:pt x="426048" y="830822"/>
-                  </a:lnTo>
-                  <a:lnTo>
-                    <a:pt x="497671" y="949565"/>
-                  </a:lnTo>
-                  <a:lnTo>
-                    <a:pt x="569293" y="1062994"/>
-                  </a:lnTo>
-                  <a:lnTo>
-                    <a:pt x="640916" y="1171345"/>
-                  </a:lnTo>
-                  <a:lnTo>
-                    <a:pt x="712538" y="1274847"/>
-                  </a:lnTo>
-                  <a:lnTo>
-                    <a:pt x="784161" y="1373716"/>
-                  </a:lnTo>
-                  <a:lnTo>
-                    <a:pt x="855783" y="1468160"/>
-                  </a:lnTo>
-                  <a:lnTo>
-                    <a:pt x="927406" y="1558377"/>
-                  </a:lnTo>
-                  <a:lnTo>
-                    <a:pt x="999028" y="1644555"/>
-                  </a:lnTo>
-                  <a:lnTo>
-                    <a:pt x="1070651" y="1726876"/>
-                  </a:lnTo>
-                  <a:lnTo>
-                    <a:pt x="1142273" y="1805513"/>
-                  </a:lnTo>
-                  <a:lnTo>
-                    <a:pt x="1213896" y="1880630"/>
-                  </a:lnTo>
-                  <a:lnTo>
-                    <a:pt x="1285518" y="1952384"/>
-                  </a:lnTo>
-                  <a:lnTo>
-                    <a:pt x="1357141" y="2020927"/>
-                  </a:lnTo>
-                  <a:lnTo>
-                    <a:pt x="1428763" y="2086402"/>
-                  </a:lnTo>
-                  <a:lnTo>
-                    <a:pt x="1500386" y="2148946"/>
-                  </a:lnTo>
-                  <a:lnTo>
-                    <a:pt x="1572008" y="2208691"/>
-                  </a:lnTo>
-                  <a:lnTo>
-                    <a:pt x="1643631" y="2265762"/>
-                  </a:lnTo>
-                  <a:lnTo>
-                    <a:pt x="1715253" y="2320278"/>
-                  </a:lnTo>
-                  <a:lnTo>
-                    <a:pt x="1786876" y="2372355"/>
-                  </a:lnTo>
-                  <a:lnTo>
-                    <a:pt x="1858499" y="2422100"/>
-                  </a:lnTo>
-                  <a:lnTo>
-                    <a:pt x="1930121" y="2469619"/>
-                  </a:lnTo>
-                  <a:lnTo>
-                    <a:pt x="2001744" y="2515010"/>
-                  </a:lnTo>
-                  <a:lnTo>
-                    <a:pt x="2073366" y="2558370"/>
-                  </a:lnTo>
-                  <a:lnTo>
-                    <a:pt x="2144989" y="2599790"/>
-                  </a:lnTo>
-                  <a:lnTo>
-                    <a:pt x="2216611" y="2639355"/>
-                  </a:lnTo>
-                  <a:lnTo>
-                    <a:pt x="2288234" y="2659868"/>
-                  </a:lnTo>
-                  <a:lnTo>
-                    <a:pt x="2359856" y="2668936"/>
-                  </a:lnTo>
-                  <a:lnTo>
-                    <a:pt x="2431479" y="2677904"/>
-                  </a:lnTo>
-                  <a:lnTo>
-                    <a:pt x="2503101" y="2686774"/>
-                  </a:lnTo>
-                  <a:lnTo>
-                    <a:pt x="2574724" y="2695546"/>
-                  </a:lnTo>
-                  <a:lnTo>
-                    <a:pt x="2646346" y="2704221"/>
-                  </a:lnTo>
-                  <a:lnTo>
-                    <a:pt x="2717969" y="2712801"/>
-                  </a:lnTo>
-                  <a:lnTo>
-                    <a:pt x="2789591" y="2721286"/>
-                  </a:lnTo>
-                  <a:lnTo>
-                    <a:pt x="2861214" y="2729678"/>
-                  </a:lnTo>
-                  <a:lnTo>
-                    <a:pt x="2932836" y="2737978"/>
-                  </a:lnTo>
-                  <a:lnTo>
-                    <a:pt x="3004459" y="2746186"/>
-                  </a:lnTo>
-                  <a:lnTo>
-                    <a:pt x="3076081" y="2754304"/>
-                  </a:lnTo>
-                  <a:lnTo>
-                    <a:pt x="3147704" y="2762332"/>
-                  </a:lnTo>
-                  <a:lnTo>
-                    <a:pt x="3219327" y="2770272"/>
-                  </a:lnTo>
-                  <a:lnTo>
-                    <a:pt x="3290949" y="2778125"/>
-                  </a:lnTo>
-                  <a:lnTo>
-                    <a:pt x="3362572" y="2785892"/>
-                  </a:lnTo>
-                  <a:lnTo>
-                    <a:pt x="3434194" y="2793572"/>
-                  </a:lnTo>
-                  <a:lnTo>
-                    <a:pt x="3505817" y="2801169"/>
-                  </a:lnTo>
-                  <a:lnTo>
-                    <a:pt x="3577439" y="2808682"/>
-                  </a:lnTo>
-                  <a:lnTo>
-                    <a:pt x="3649062" y="2816112"/>
-                  </a:lnTo>
-                  <a:lnTo>
-                    <a:pt x="3720684" y="2823460"/>
-                  </a:lnTo>
-                  <a:lnTo>
-                    <a:pt x="3792307" y="2830727"/>
-                  </a:lnTo>
-                  <a:lnTo>
-                    <a:pt x="3863929" y="2837915"/>
-                  </a:lnTo>
-                  <a:lnTo>
-                    <a:pt x="3935552" y="2845023"/>
-                  </a:lnTo>
-                  <a:lnTo>
-                    <a:pt x="4007174" y="2852053"/>
-                  </a:lnTo>
-                  <a:lnTo>
-                    <a:pt x="4078797" y="2859006"/>
-                  </a:lnTo>
-                  <a:lnTo>
-                    <a:pt x="4150419" y="2865882"/>
-                  </a:lnTo>
-                  <a:lnTo>
-                    <a:pt x="4222042" y="2872682"/>
-                  </a:lnTo>
-                  <a:lnTo>
-                    <a:pt x="4293664" y="2879408"/>
-                  </a:lnTo>
-                  <a:lnTo>
-                    <a:pt x="4365287" y="2886060"/>
-                  </a:lnTo>
-                  <a:lnTo>
-                    <a:pt x="4436909" y="2892638"/>
-                  </a:lnTo>
-                  <a:lnTo>
-                    <a:pt x="4508532" y="2899144"/>
-                  </a:lnTo>
-                  <a:lnTo>
-                    <a:pt x="4580155" y="2905578"/>
-                  </a:lnTo>
-                  <a:lnTo>
-                    <a:pt x="4651777" y="2911942"/>
-                  </a:lnTo>
-                  <a:lnTo>
-                    <a:pt x="4723400" y="2918235"/>
+                    <a:pt x="34385" y="77468"/>
+                  </a:lnTo>
+                  <a:lnTo>
+                    <a:pt x="106007" y="231532"/>
+                  </a:lnTo>
+                  <a:lnTo>
+                    <a:pt x="177630" y="378629"/>
+                  </a:lnTo>
+                  <a:lnTo>
+                    <a:pt x="249252" y="519072"/>
+                  </a:lnTo>
+                  <a:lnTo>
+                    <a:pt x="320875" y="653163"/>
+                  </a:lnTo>
+                  <a:lnTo>
+                    <a:pt x="392497" y="781189"/>
+                  </a:lnTo>
+                  <a:lnTo>
+                    <a:pt x="464120" y="903425"/>
+                  </a:lnTo>
+                  <a:lnTo>
+                    <a:pt x="535742" y="1020132"/>
+                  </a:lnTo>
+                  <a:lnTo>
+                    <a:pt x="607365" y="1131560"/>
+                  </a:lnTo>
+                  <a:lnTo>
+                    <a:pt x="678987" y="1237949"/>
+                  </a:lnTo>
+                  <a:lnTo>
+                    <a:pt x="750610" y="1339525"/>
+                  </a:lnTo>
+                  <a:lnTo>
+                    <a:pt x="822232" y="1436507"/>
+                  </a:lnTo>
+                  <a:lnTo>
+                    <a:pt x="893855" y="1529103"/>
+                  </a:lnTo>
+                  <a:lnTo>
+                    <a:pt x="965477" y="1617511"/>
+                  </a:lnTo>
+                  <a:lnTo>
+                    <a:pt x="1037100" y="1701920"/>
+                  </a:lnTo>
+                  <a:lnTo>
+                    <a:pt x="1108722" y="1782511"/>
+                  </a:lnTo>
+                  <a:lnTo>
+                    <a:pt x="1180345" y="1859458"/>
+                  </a:lnTo>
+                  <a:lnTo>
+                    <a:pt x="1251967" y="1932924"/>
+                  </a:lnTo>
+                  <a:lnTo>
+                    <a:pt x="1323590" y="2003067"/>
+                  </a:lnTo>
+                  <a:lnTo>
+                    <a:pt x="1395213" y="2070037"/>
+                  </a:lnTo>
+                  <a:lnTo>
+                    <a:pt x="1466835" y="2133979"/>
+                  </a:lnTo>
+                  <a:lnTo>
+                    <a:pt x="1538458" y="2195028"/>
+                  </a:lnTo>
+                  <a:lnTo>
+                    <a:pt x="1610080" y="2253317"/>
+                  </a:lnTo>
+                  <a:lnTo>
+                    <a:pt x="1681703" y="2308968"/>
+                  </a:lnTo>
+                  <a:lnTo>
+                    <a:pt x="1753325" y="2362103"/>
+                  </a:lnTo>
+                  <a:lnTo>
+                    <a:pt x="1824948" y="2412835"/>
+                  </a:lnTo>
+                  <a:lnTo>
+                    <a:pt x="1896570" y="2461272"/>
+                  </a:lnTo>
+                  <a:lnTo>
+                    <a:pt x="1968193" y="2507518"/>
+                  </a:lnTo>
+                  <a:lnTo>
+                    <a:pt x="2039815" y="2551672"/>
+                  </a:lnTo>
+                  <a:lnTo>
+                    <a:pt x="2111438" y="2593829"/>
+                  </a:lnTo>
+                  <a:lnTo>
+                    <a:pt x="2183060" y="2634080"/>
+                  </a:lnTo>
+                  <a:lnTo>
+                    <a:pt x="2254683" y="2658773"/>
+                  </a:lnTo>
+                  <a:lnTo>
+                    <a:pt x="2326305" y="2668047"/>
+                  </a:lnTo>
+                  <a:lnTo>
+                    <a:pt x="2397928" y="2677217"/>
+                  </a:lnTo>
+                  <a:lnTo>
+                    <a:pt x="2469550" y="2686284"/>
+                  </a:lnTo>
+                  <a:lnTo>
+                    <a:pt x="2541173" y="2695249"/>
+                  </a:lnTo>
+                  <a:lnTo>
+                    <a:pt x="2612795" y="2704113"/>
+                  </a:lnTo>
+                  <a:lnTo>
+                    <a:pt x="2684418" y="2712877"/>
+                  </a:lnTo>
+                  <a:lnTo>
+                    <a:pt x="2756041" y="2721543"/>
+                  </a:lnTo>
+                  <a:lnTo>
+                    <a:pt x="2827663" y="2730112"/>
+                  </a:lnTo>
+                  <a:lnTo>
+                    <a:pt x="2899286" y="2738584"/>
+                  </a:lnTo>
+                  <a:lnTo>
+                    <a:pt x="2970908" y="2746961"/>
+                  </a:lnTo>
+                  <a:lnTo>
+                    <a:pt x="3042531" y="2755244"/>
+                  </a:lnTo>
+                  <a:lnTo>
+                    <a:pt x="3114153" y="2763434"/>
+                  </a:lnTo>
+                  <a:lnTo>
+                    <a:pt x="3185776" y="2771531"/>
+                  </a:lnTo>
+                  <a:lnTo>
+                    <a:pt x="3257398" y="2779538"/>
+                  </a:lnTo>
+                  <a:lnTo>
+                    <a:pt x="3329021" y="2787454"/>
+                  </a:lnTo>
+                  <a:lnTo>
+                    <a:pt x="3400643" y="2795282"/>
+                  </a:lnTo>
+                  <a:lnTo>
+                    <a:pt x="3472266" y="2803022"/>
+                  </a:lnTo>
+                  <a:lnTo>
+                    <a:pt x="3543888" y="2810674"/>
+                  </a:lnTo>
+                  <a:lnTo>
+                    <a:pt x="3615511" y="2818241"/>
+                  </a:lnTo>
+                  <a:lnTo>
+                    <a:pt x="3687133" y="2825722"/>
+                  </a:lnTo>
+                  <a:lnTo>
+                    <a:pt x="3758756" y="2833120"/>
+                  </a:lnTo>
+                  <a:lnTo>
+                    <a:pt x="3830378" y="2840434"/>
+                  </a:lnTo>
+                  <a:lnTo>
+                    <a:pt x="3902001" y="2847666"/>
+                  </a:lnTo>
+                  <a:lnTo>
+                    <a:pt x="3973623" y="2854817"/>
+                  </a:lnTo>
+                  <a:lnTo>
+                    <a:pt x="4045246" y="2861887"/>
+                  </a:lnTo>
+                  <a:lnTo>
+                    <a:pt x="4116869" y="2868878"/>
+                  </a:lnTo>
+                  <a:lnTo>
+                    <a:pt x="4188491" y="2875790"/>
+                  </a:lnTo>
+                  <a:lnTo>
+                    <a:pt x="4260114" y="2882625"/>
+                  </a:lnTo>
+                  <a:lnTo>
+                    <a:pt x="4331736" y="2889382"/>
+                  </a:lnTo>
+                  <a:lnTo>
+                    <a:pt x="4403359" y="2896064"/>
+                  </a:lnTo>
+                  <a:lnTo>
+                    <a:pt x="4474981" y="2902671"/>
+                  </a:lnTo>
+                  <a:lnTo>
+                    <a:pt x="4546604" y="2909203"/>
+                  </a:lnTo>
+                  <a:lnTo>
+                    <a:pt x="4618226" y="2915662"/>
+                  </a:lnTo>
+                  <a:lnTo>
+                    <a:pt x="4689849" y="2922048"/>
                   </a:lnTo>
                 </a:path>
               </a:pathLst>
@@ -3674,309 +3674,309 @@
           </p:nvSpPr>
           <p:spPr>
             <a:xfrm>
-              <a:off x="1172049" y="3865689"/>
-              <a:ext cx="7090630" cy="1521543"/>
+              <a:off x="1172049" y="3837025"/>
+              <a:ext cx="7090630" cy="1552068"/>
             </a:xfrm>
             <a:custGeom>
               <a:avLst/>
               <a:pathLst>
-                <a:path w="7090630" h="1521543">
+                <a:path w="7090630" h="1552068">
                   <a:moveTo>
-                    <a:pt x="7090630" y="1521543"/>
+                    <a:pt x="7090630" y="1552068"/>
                   </a:moveTo>
                   <a:lnTo>
-                    <a:pt x="7019007" y="1513577"/>
-                  </a:lnTo>
-                  <a:lnTo>
-                    <a:pt x="6947385" y="1505237"/>
-                  </a:lnTo>
-                  <a:lnTo>
-                    <a:pt x="6875762" y="1496507"/>
-                  </a:lnTo>
-                  <a:lnTo>
-                    <a:pt x="6804139" y="1487367"/>
-                  </a:lnTo>
-                  <a:lnTo>
-                    <a:pt x="6732517" y="1477800"/>
-                  </a:lnTo>
-                  <a:lnTo>
-                    <a:pt x="6660894" y="1467783"/>
-                  </a:lnTo>
-                  <a:lnTo>
-                    <a:pt x="6589272" y="1457298"/>
-                  </a:lnTo>
-                  <a:lnTo>
-                    <a:pt x="6517649" y="1446321"/>
-                  </a:lnTo>
-                  <a:lnTo>
-                    <a:pt x="6446027" y="1434830"/>
-                  </a:lnTo>
-                  <a:lnTo>
-                    <a:pt x="6374404" y="1422801"/>
-                  </a:lnTo>
-                  <a:lnTo>
-                    <a:pt x="6302782" y="1410208"/>
-                  </a:lnTo>
-                  <a:lnTo>
-                    <a:pt x="6231159" y="1397024"/>
-                  </a:lnTo>
-                  <a:lnTo>
-                    <a:pt x="6159537" y="1383223"/>
-                  </a:lnTo>
-                  <a:lnTo>
-                    <a:pt x="6087914" y="1368776"/>
-                  </a:lnTo>
-                  <a:lnTo>
-                    <a:pt x="6016292" y="1353651"/>
-                  </a:lnTo>
-                  <a:lnTo>
-                    <a:pt x="5944669" y="1337818"/>
-                  </a:lnTo>
-                  <a:lnTo>
-                    <a:pt x="5873047" y="1321243"/>
-                  </a:lnTo>
-                  <a:lnTo>
-                    <a:pt x="5801424" y="1303891"/>
-                  </a:lnTo>
-                  <a:lnTo>
-                    <a:pt x="5729802" y="1285726"/>
-                  </a:lnTo>
-                  <a:lnTo>
-                    <a:pt x="5658179" y="1266710"/>
-                  </a:lnTo>
-                  <a:lnTo>
-                    <a:pt x="5586557" y="1246803"/>
-                  </a:lnTo>
-                  <a:lnTo>
-                    <a:pt x="5514934" y="1225963"/>
-                  </a:lnTo>
-                  <a:lnTo>
-                    <a:pt x="5443311" y="1204147"/>
-                  </a:lnTo>
-                  <a:lnTo>
-                    <a:pt x="5371689" y="1181308"/>
-                  </a:lnTo>
-                  <a:lnTo>
-                    <a:pt x="5300066" y="1157400"/>
-                  </a:lnTo>
-                  <a:lnTo>
-                    <a:pt x="5228444" y="1132371"/>
-                  </a:lnTo>
-                  <a:lnTo>
-                    <a:pt x="5156821" y="1106169"/>
-                  </a:lnTo>
-                  <a:lnTo>
-                    <a:pt x="5085199" y="1078739"/>
-                  </a:lnTo>
-                  <a:lnTo>
-                    <a:pt x="5013576" y="1050025"/>
-                  </a:lnTo>
-                  <a:lnTo>
-                    <a:pt x="4941954" y="1019964"/>
-                  </a:lnTo>
-                  <a:lnTo>
-                    <a:pt x="4870331" y="988496"/>
-                  </a:lnTo>
-                  <a:lnTo>
-                    <a:pt x="4798709" y="955552"/>
-                  </a:lnTo>
-                  <a:lnTo>
-                    <a:pt x="4727086" y="921066"/>
-                  </a:lnTo>
-                  <a:lnTo>
-                    <a:pt x="4655464" y="884963"/>
-                  </a:lnTo>
-                  <a:lnTo>
-                    <a:pt x="4583841" y="858512"/>
-                  </a:lnTo>
-                  <a:lnTo>
-                    <a:pt x="4512219" y="849242"/>
-                  </a:lnTo>
-                  <a:lnTo>
-                    <a:pt x="4440596" y="839867"/>
-                  </a:lnTo>
-                  <a:lnTo>
-                    <a:pt x="4368974" y="830389"/>
-                  </a:lnTo>
-                  <a:lnTo>
-                    <a:pt x="4297351" y="820805"/>
-                  </a:lnTo>
-                  <a:lnTo>
-                    <a:pt x="4225729" y="811115"/>
-                  </a:lnTo>
-                  <a:lnTo>
-                    <a:pt x="4154106" y="801316"/>
-                  </a:lnTo>
-                  <a:lnTo>
-                    <a:pt x="4082483" y="791409"/>
-                  </a:lnTo>
-                  <a:lnTo>
-                    <a:pt x="4010861" y="781391"/>
-                  </a:lnTo>
-                  <a:lnTo>
-                    <a:pt x="3939238" y="771262"/>
-                  </a:lnTo>
-                  <a:lnTo>
-                    <a:pt x="3867616" y="761020"/>
-                  </a:lnTo>
-                  <a:lnTo>
-                    <a:pt x="3795993" y="750664"/>
-                  </a:lnTo>
-                  <a:lnTo>
-                    <a:pt x="3724371" y="740193"/>
-                  </a:lnTo>
-                  <a:lnTo>
-                    <a:pt x="3652748" y="729605"/>
-                  </a:lnTo>
-                  <a:lnTo>
-                    <a:pt x="3581126" y="718900"/>
-                  </a:lnTo>
-                  <a:lnTo>
-                    <a:pt x="3509503" y="708075"/>
-                  </a:lnTo>
-                  <a:lnTo>
-                    <a:pt x="3437881" y="697130"/>
-                  </a:lnTo>
-                  <a:lnTo>
-                    <a:pt x="3366258" y="686063"/>
-                  </a:lnTo>
-                  <a:lnTo>
-                    <a:pt x="3294636" y="674873"/>
-                  </a:lnTo>
-                  <a:lnTo>
-                    <a:pt x="3223013" y="663558"/>
-                  </a:lnTo>
-                  <a:lnTo>
-                    <a:pt x="3151391" y="652118"/>
-                  </a:lnTo>
-                  <a:lnTo>
-                    <a:pt x="3079768" y="640550"/>
-                  </a:lnTo>
-                  <a:lnTo>
-                    <a:pt x="3008146" y="628853"/>
-                  </a:lnTo>
-                  <a:lnTo>
-                    <a:pt x="2936523" y="617027"/>
-                  </a:lnTo>
-                  <a:lnTo>
-                    <a:pt x="2864901" y="605068"/>
-                  </a:lnTo>
-                  <a:lnTo>
-                    <a:pt x="2793278" y="592977"/>
-                  </a:lnTo>
-                  <a:lnTo>
-                    <a:pt x="2721655" y="580751"/>
-                  </a:lnTo>
-                  <a:lnTo>
-                    <a:pt x="2650033" y="568389"/>
-                  </a:lnTo>
-                  <a:lnTo>
-                    <a:pt x="2578410" y="555889"/>
-                  </a:lnTo>
-                  <a:lnTo>
-                    <a:pt x="2506788" y="543250"/>
-                  </a:lnTo>
-                  <a:lnTo>
-                    <a:pt x="2435165" y="530471"/>
-                  </a:lnTo>
-                  <a:lnTo>
-                    <a:pt x="2363543" y="517549"/>
-                  </a:lnTo>
-                  <a:lnTo>
-                    <a:pt x="2291920" y="504484"/>
-                  </a:lnTo>
-                  <a:lnTo>
-                    <a:pt x="2220298" y="491273"/>
-                  </a:lnTo>
-                  <a:lnTo>
-                    <a:pt x="2148675" y="477915"/>
-                  </a:lnTo>
-                  <a:lnTo>
-                    <a:pt x="2077053" y="464408"/>
-                  </a:lnTo>
-                  <a:lnTo>
-                    <a:pt x="2005430" y="450752"/>
-                  </a:lnTo>
-                  <a:lnTo>
-                    <a:pt x="1933808" y="436943"/>
-                  </a:lnTo>
-                  <a:lnTo>
-                    <a:pt x="1862185" y="422980"/>
-                  </a:lnTo>
-                  <a:lnTo>
-                    <a:pt x="1790563" y="408862"/>
-                  </a:lnTo>
-                  <a:lnTo>
-                    <a:pt x="1718940" y="394587"/>
-                  </a:lnTo>
-                  <a:lnTo>
-                    <a:pt x="1647318" y="380153"/>
-                  </a:lnTo>
-                  <a:lnTo>
-                    <a:pt x="1575695" y="365559"/>
-                  </a:lnTo>
-                  <a:lnTo>
-                    <a:pt x="1504073" y="350802"/>
-                  </a:lnTo>
-                  <a:lnTo>
-                    <a:pt x="1432450" y="335881"/>
-                  </a:lnTo>
-                  <a:lnTo>
-                    <a:pt x="1360827" y="320793"/>
-                  </a:lnTo>
-                  <a:lnTo>
-                    <a:pt x="1289205" y="305538"/>
-                  </a:lnTo>
-                  <a:lnTo>
-                    <a:pt x="1217582" y="290113"/>
-                  </a:lnTo>
-                  <a:lnTo>
-                    <a:pt x="1145960" y="274517"/>
-                  </a:lnTo>
-                  <a:lnTo>
-                    <a:pt x="1074337" y="258747"/>
-                  </a:lnTo>
-                  <a:lnTo>
-                    <a:pt x="1002715" y="242801"/>
-                  </a:lnTo>
-                  <a:lnTo>
-                    <a:pt x="931092" y="226678"/>
-                  </a:lnTo>
-                  <a:lnTo>
-                    <a:pt x="859470" y="210375"/>
-                  </a:lnTo>
-                  <a:lnTo>
-                    <a:pt x="787847" y="193891"/>
-                  </a:lnTo>
-                  <a:lnTo>
-                    <a:pt x="716225" y="177224"/>
-                  </a:lnTo>
-                  <a:lnTo>
-                    <a:pt x="644602" y="160371"/>
-                  </a:lnTo>
-                  <a:lnTo>
-                    <a:pt x="572980" y="143331"/>
-                  </a:lnTo>
-                  <a:lnTo>
-                    <a:pt x="501357" y="126100"/>
-                  </a:lnTo>
-                  <a:lnTo>
-                    <a:pt x="429735" y="108679"/>
-                  </a:lnTo>
-                  <a:lnTo>
-                    <a:pt x="358112" y="91063"/>
-                  </a:lnTo>
-                  <a:lnTo>
-                    <a:pt x="286490" y="73251"/>
-                  </a:lnTo>
-                  <a:lnTo>
-                    <a:pt x="214867" y="55241"/>
-                  </a:lnTo>
-                  <a:lnTo>
-                    <a:pt x="143245" y="37031"/>
-                  </a:lnTo>
-                  <a:lnTo>
-                    <a:pt x="71622" y="18618"/>
+                    <a:pt x="7019007" y="1544102"/>
+                  </a:lnTo>
+                  <a:lnTo>
+                    <a:pt x="6947385" y="1535759"/>
+                  </a:lnTo>
+                  <a:lnTo>
+                    <a:pt x="6875762" y="1527020"/>
+                  </a:lnTo>
+                  <a:lnTo>
+                    <a:pt x="6804139" y="1517868"/>
+                  </a:lnTo>
+                  <a:lnTo>
+                    <a:pt x="6732517" y="1508282"/>
+                  </a:lnTo>
+                  <a:lnTo>
+                    <a:pt x="6660894" y="1498242"/>
+                  </a:lnTo>
+                  <a:lnTo>
+                    <a:pt x="6589272" y="1487726"/>
+                  </a:lnTo>
+                  <a:lnTo>
+                    <a:pt x="6517649" y="1476712"/>
+                  </a:lnTo>
+                  <a:lnTo>
+                    <a:pt x="6446027" y="1465176"/>
+                  </a:lnTo>
+                  <a:lnTo>
+                    <a:pt x="6374404" y="1453094"/>
+                  </a:lnTo>
+                  <a:lnTo>
+                    <a:pt x="6302782" y="1440440"/>
+                  </a:lnTo>
+                  <a:lnTo>
+                    <a:pt x="6231159" y="1427186"/>
+                  </a:lnTo>
+                  <a:lnTo>
+                    <a:pt x="6159537" y="1413304"/>
+                  </a:lnTo>
+                  <a:lnTo>
+                    <a:pt x="6087914" y="1398764"/>
+                  </a:lnTo>
+                  <a:lnTo>
+                    <a:pt x="6016292" y="1383536"/>
+                  </a:lnTo>
+                  <a:lnTo>
+                    <a:pt x="5944669" y="1367586"/>
+                  </a:lnTo>
+                  <a:lnTo>
+                    <a:pt x="5873047" y="1350881"/>
+                  </a:lnTo>
+                  <a:lnTo>
+                    <a:pt x="5801424" y="1333385"/>
+                  </a:lnTo>
+                  <a:lnTo>
+                    <a:pt x="5729802" y="1315059"/>
+                  </a:lnTo>
+                  <a:lnTo>
+                    <a:pt x="5658179" y="1295866"/>
+                  </a:lnTo>
+                  <a:lnTo>
+                    <a:pt x="5586557" y="1275763"/>
+                  </a:lnTo>
+                  <a:lnTo>
+                    <a:pt x="5514934" y="1254708"/>
+                  </a:lnTo>
+                  <a:lnTo>
+                    <a:pt x="5443311" y="1232655"/>
+                  </a:lnTo>
+                  <a:lnTo>
+                    <a:pt x="5371689" y="1209558"/>
+                  </a:lnTo>
+                  <a:lnTo>
+                    <a:pt x="5300066" y="1185367"/>
+                  </a:lnTo>
+                  <a:lnTo>
+                    <a:pt x="5228444" y="1160029"/>
+                  </a:lnTo>
+                  <a:lnTo>
+                    <a:pt x="5156821" y="1133492"/>
+                  </a:lnTo>
+                  <a:lnTo>
+                    <a:pt x="5085199" y="1105697"/>
+                  </a:lnTo>
+                  <a:lnTo>
+                    <a:pt x="5013576" y="1076585"/>
+                  </a:lnTo>
+                  <a:lnTo>
+                    <a:pt x="4941954" y="1046095"/>
+                  </a:lnTo>
+                  <a:lnTo>
+                    <a:pt x="4870331" y="1014160"/>
+                  </a:lnTo>
+                  <a:lnTo>
+                    <a:pt x="4798709" y="980712"/>
+                  </a:lnTo>
+                  <a:lnTo>
+                    <a:pt x="4727086" y="945679"/>
+                  </a:lnTo>
+                  <a:lnTo>
+                    <a:pt x="4655464" y="908988"/>
+                  </a:lnTo>
+                  <a:lnTo>
+                    <a:pt x="4583841" y="885870"/>
+                  </a:lnTo>
+                  <a:lnTo>
+                    <a:pt x="4512219" y="876384"/>
+                  </a:lnTo>
+                  <a:lnTo>
+                    <a:pt x="4440596" y="866790"/>
+                  </a:lnTo>
+                  <a:lnTo>
+                    <a:pt x="4368974" y="857086"/>
+                  </a:lnTo>
+                  <a:lnTo>
+                    <a:pt x="4297351" y="847273"/>
+                  </a:lnTo>
+                  <a:lnTo>
+                    <a:pt x="4225729" y="837348"/>
+                  </a:lnTo>
+                  <a:lnTo>
+                    <a:pt x="4154106" y="827310"/>
+                  </a:lnTo>
+                  <a:lnTo>
+                    <a:pt x="4082483" y="817158"/>
+                  </a:lnTo>
+                  <a:lnTo>
+                    <a:pt x="4010861" y="806890"/>
+                  </a:lnTo>
+                  <a:lnTo>
+                    <a:pt x="3939238" y="796506"/>
+                  </a:lnTo>
+                  <a:lnTo>
+                    <a:pt x="3867616" y="786003"/>
+                  </a:lnTo>
+                  <a:lnTo>
+                    <a:pt x="3795993" y="775382"/>
+                  </a:lnTo>
+                  <a:lnTo>
+                    <a:pt x="3724371" y="764639"/>
+                  </a:lnTo>
+                  <a:lnTo>
+                    <a:pt x="3652748" y="753774"/>
+                  </a:lnTo>
+                  <a:lnTo>
+                    <a:pt x="3581126" y="742786"/>
+                  </a:lnTo>
+                  <a:lnTo>
+                    <a:pt x="3509503" y="731673"/>
+                  </a:lnTo>
+                  <a:lnTo>
+                    <a:pt x="3437881" y="720434"/>
+                  </a:lnTo>
+                  <a:lnTo>
+                    <a:pt x="3366258" y="709066"/>
+                  </a:lnTo>
+                  <a:lnTo>
+                    <a:pt x="3294636" y="697570"/>
+                  </a:lnTo>
+                  <a:lnTo>
+                    <a:pt x="3223013" y="685943"/>
+                  </a:lnTo>
+                  <a:lnTo>
+                    <a:pt x="3151391" y="674183"/>
+                  </a:lnTo>
+                  <a:lnTo>
+                    <a:pt x="3079768" y="662290"/>
+                  </a:lnTo>
+                  <a:lnTo>
+                    <a:pt x="3008146" y="650262"/>
+                  </a:lnTo>
+                  <a:lnTo>
+                    <a:pt x="2936523" y="638097"/>
+                  </a:lnTo>
+                  <a:lnTo>
+                    <a:pt x="2864901" y="625793"/>
+                  </a:lnTo>
+                  <a:lnTo>
+                    <a:pt x="2793278" y="613350"/>
+                  </a:lnTo>
+                  <a:lnTo>
+                    <a:pt x="2721655" y="600765"/>
+                  </a:lnTo>
+                  <a:lnTo>
+                    <a:pt x="2650033" y="588037"/>
+                  </a:lnTo>
+                  <a:lnTo>
+                    <a:pt x="2578410" y="575165"/>
+                  </a:lnTo>
+                  <a:lnTo>
+                    <a:pt x="2506788" y="562146"/>
+                  </a:lnTo>
+                  <a:lnTo>
+                    <a:pt x="2435165" y="548979"/>
+                  </a:lnTo>
+                  <a:lnTo>
+                    <a:pt x="2363543" y="535662"/>
+                  </a:lnTo>
+                  <a:lnTo>
+                    <a:pt x="2291920" y="522194"/>
+                  </a:lnTo>
+                  <a:lnTo>
+                    <a:pt x="2220298" y="508573"/>
+                  </a:lnTo>
+                  <a:lnTo>
+                    <a:pt x="2148675" y="494797"/>
+                  </a:lnTo>
+                  <a:lnTo>
+                    <a:pt x="2077053" y="480864"/>
+                  </a:lnTo>
+                  <a:lnTo>
+                    <a:pt x="2005430" y="466773"/>
+                  </a:lnTo>
+                  <a:lnTo>
+                    <a:pt x="1933808" y="452522"/>
+                  </a:lnTo>
+                  <a:lnTo>
+                    <a:pt x="1862185" y="438108"/>
+                  </a:lnTo>
+                  <a:lnTo>
+                    <a:pt x="1790563" y="423531"/>
+                  </a:lnTo>
+                  <a:lnTo>
+                    <a:pt x="1718940" y="408788"/>
+                  </a:lnTo>
+                  <a:lnTo>
+                    <a:pt x="1647318" y="393878"/>
+                  </a:lnTo>
+                  <a:lnTo>
+                    <a:pt x="1575695" y="378798"/>
+                  </a:lnTo>
+                  <a:lnTo>
+                    <a:pt x="1504073" y="363546"/>
+                  </a:lnTo>
+                  <a:lnTo>
+                    <a:pt x="1432450" y="348121"/>
+                  </a:lnTo>
+                  <a:lnTo>
+                    <a:pt x="1360827" y="332521"/>
+                  </a:lnTo>
+                  <a:lnTo>
+                    <a:pt x="1289205" y="316743"/>
+                  </a:lnTo>
+                  <a:lnTo>
+                    <a:pt x="1217582" y="300786"/>
+                  </a:lnTo>
+                  <a:lnTo>
+                    <a:pt x="1145960" y="284647"/>
+                  </a:lnTo>
+                  <a:lnTo>
+                    <a:pt x="1074337" y="268325"/>
+                  </a:lnTo>
+                  <a:lnTo>
+                    <a:pt x="1002715" y="251818"/>
+                  </a:lnTo>
+                  <a:lnTo>
+                    <a:pt x="931092" y="235122"/>
+                  </a:lnTo>
+                  <a:lnTo>
+                    <a:pt x="859470" y="218237"/>
+                  </a:lnTo>
+                  <a:lnTo>
+                    <a:pt x="787847" y="201160"/>
+                  </a:lnTo>
+                  <a:lnTo>
+                    <a:pt x="716225" y="183889"/>
+                  </a:lnTo>
+                  <a:lnTo>
+                    <a:pt x="644602" y="166421"/>
+                  </a:lnTo>
+                  <a:lnTo>
+                    <a:pt x="572980" y="148755"/>
+                  </a:lnTo>
+                  <a:lnTo>
+                    <a:pt x="501357" y="130888"/>
+                  </a:lnTo>
+                  <a:lnTo>
+                    <a:pt x="429735" y="112818"/>
+                  </a:lnTo>
+                  <a:lnTo>
+                    <a:pt x="358112" y="94542"/>
+                  </a:lnTo>
+                  <a:lnTo>
+                    <a:pt x="286490" y="76059"/>
+                  </a:lnTo>
+                  <a:lnTo>
+                    <a:pt x="214867" y="57365"/>
+                  </a:lnTo>
+                  <a:lnTo>
+                    <a:pt x="143245" y="38459"/>
+                  </a:lnTo>
+                  <a:lnTo>
+                    <a:pt x="71622" y="19338"/>
                   </a:lnTo>
                   <a:lnTo>
                     <a:pt x="0" y="0"/>
@@ -3999,273 +3999,270 @@
           </p:nvSpPr>
           <p:spPr>
             <a:xfrm>
-              <a:off x="2168491" y="2073503"/>
-              <a:ext cx="6094188" cy="3173672"/>
+              <a:off x="2223825" y="2073503"/>
+              <a:ext cx="6038853" cy="3176415"/>
             </a:xfrm>
             <a:custGeom>
               <a:avLst/>
               <a:pathLst>
-                <a:path w="6094188" h="3173672">
+                <a:path w="6038853" h="3176415">
                   <a:moveTo>
                     <a:pt x="0" y="0"/>
                   </a:moveTo>
                   <a:lnTo>
-                    <a:pt x="6273" y="8777"/>
-                  </a:lnTo>
-                  <a:lnTo>
-                    <a:pt x="77895" y="106178"/>
-                  </a:lnTo>
-                  <a:lnTo>
-                    <a:pt x="149518" y="200850"/>
-                  </a:lnTo>
-                  <a:lnTo>
-                    <a:pt x="221141" y="292867"/>
-                  </a:lnTo>
-                  <a:lnTo>
-                    <a:pt x="292763" y="382306"/>
-                  </a:lnTo>
-                  <a:lnTo>
-                    <a:pt x="364386" y="469238"/>
-                  </a:lnTo>
-                  <a:lnTo>
-                    <a:pt x="436008" y="553733"/>
-                  </a:lnTo>
-                  <a:lnTo>
-                    <a:pt x="507631" y="635859"/>
-                  </a:lnTo>
-                  <a:lnTo>
-                    <a:pt x="579253" y="715684"/>
-                  </a:lnTo>
-                  <a:lnTo>
-                    <a:pt x="650876" y="793271"/>
-                  </a:lnTo>
-                  <a:lnTo>
-                    <a:pt x="722498" y="868684"/>
-                  </a:lnTo>
-                  <a:lnTo>
-                    <a:pt x="794121" y="941982"/>
-                  </a:lnTo>
-                  <a:lnTo>
-                    <a:pt x="865743" y="1013227"/>
-                  </a:lnTo>
-                  <a:lnTo>
-                    <a:pt x="937366" y="1082474"/>
-                  </a:lnTo>
-                  <a:lnTo>
-                    <a:pt x="1008988" y="1149780"/>
-                  </a:lnTo>
-                  <a:lnTo>
-                    <a:pt x="1080611" y="1215200"/>
-                  </a:lnTo>
-                  <a:lnTo>
-                    <a:pt x="1152233" y="1278786"/>
-                  </a:lnTo>
-                  <a:lnTo>
-                    <a:pt x="1223856" y="1340590"/>
-                  </a:lnTo>
-                  <a:lnTo>
-                    <a:pt x="1295478" y="1400661"/>
-                  </a:lnTo>
-                  <a:lnTo>
-                    <a:pt x="1367101" y="1459049"/>
-                  </a:lnTo>
-                  <a:lnTo>
-                    <a:pt x="1438723" y="1515800"/>
-                  </a:lnTo>
-                  <a:lnTo>
-                    <a:pt x="1510346" y="1570960"/>
-                  </a:lnTo>
-                  <a:lnTo>
-                    <a:pt x="1581968" y="1624575"/>
-                  </a:lnTo>
-                  <a:lnTo>
-                    <a:pt x="1653591" y="1676686"/>
-                  </a:lnTo>
-                  <a:lnTo>
-                    <a:pt x="1725214" y="1727337"/>
-                  </a:lnTo>
-                  <a:lnTo>
-                    <a:pt x="1796836" y="1776568"/>
-                  </a:lnTo>
-                  <a:lnTo>
-                    <a:pt x="1868459" y="1824420"/>
-                  </a:lnTo>
-                  <a:lnTo>
-                    <a:pt x="1940081" y="1870930"/>
-                  </a:lnTo>
-                  <a:lnTo>
-                    <a:pt x="2011704" y="1916136"/>
-                  </a:lnTo>
-                  <a:lnTo>
-                    <a:pt x="2083326" y="1960075"/>
-                  </a:lnTo>
-                  <a:lnTo>
-                    <a:pt x="2154949" y="2002783"/>
-                  </a:lnTo>
-                  <a:lnTo>
-                    <a:pt x="2226571" y="2044293"/>
-                  </a:lnTo>
-                  <a:lnTo>
-                    <a:pt x="2298194" y="2084640"/>
-                  </a:lnTo>
-                  <a:lnTo>
-                    <a:pt x="2369816" y="2123857"/>
-                  </a:lnTo>
-                  <a:lnTo>
-                    <a:pt x="2441439" y="2161974"/>
-                  </a:lnTo>
-                  <a:lnTo>
-                    <a:pt x="2513061" y="2199022"/>
-                  </a:lnTo>
-                  <a:lnTo>
-                    <a:pt x="2584684" y="2235032"/>
-                  </a:lnTo>
-                  <a:lnTo>
-                    <a:pt x="2656306" y="2270033"/>
-                  </a:lnTo>
-                  <a:lnTo>
-                    <a:pt x="2727929" y="2304053"/>
-                  </a:lnTo>
-                  <a:lnTo>
-                    <a:pt x="2799551" y="2337119"/>
-                  </a:lnTo>
-                  <a:lnTo>
-                    <a:pt x="2871174" y="2369258"/>
-                  </a:lnTo>
-                  <a:lnTo>
-                    <a:pt x="2942796" y="2400497"/>
-                  </a:lnTo>
-                  <a:lnTo>
-                    <a:pt x="3014419" y="2430859"/>
-                  </a:lnTo>
-                  <a:lnTo>
-                    <a:pt x="3086042" y="2460371"/>
-                  </a:lnTo>
-                  <a:lnTo>
-                    <a:pt x="3157664" y="2489056"/>
-                  </a:lnTo>
-                  <a:lnTo>
-                    <a:pt x="3229287" y="2516937"/>
-                  </a:lnTo>
-                  <a:lnTo>
-                    <a:pt x="3300909" y="2544036"/>
-                  </a:lnTo>
-                  <a:lnTo>
-                    <a:pt x="3372532" y="2570375"/>
-                  </a:lnTo>
-                  <a:lnTo>
-                    <a:pt x="3444154" y="2595977"/>
-                  </a:lnTo>
-                  <a:lnTo>
-                    <a:pt x="3515777" y="2620860"/>
-                  </a:lnTo>
-                  <a:lnTo>
-                    <a:pt x="3587399" y="2645046"/>
-                  </a:lnTo>
-                  <a:lnTo>
-                    <a:pt x="3659022" y="2668555"/>
-                  </a:lnTo>
-                  <a:lnTo>
-                    <a:pt x="3730644" y="2691404"/>
-                  </a:lnTo>
-                  <a:lnTo>
-                    <a:pt x="3802267" y="2713613"/>
-                  </a:lnTo>
-                  <a:lnTo>
-                    <a:pt x="3873889" y="2735199"/>
-                  </a:lnTo>
-                  <a:lnTo>
-                    <a:pt x="3945512" y="2756181"/>
-                  </a:lnTo>
-                  <a:lnTo>
-                    <a:pt x="4017134" y="2776574"/>
-                  </a:lnTo>
-                  <a:lnTo>
-                    <a:pt x="4088757" y="2796396"/>
-                  </a:lnTo>
-                  <a:lnTo>
-                    <a:pt x="4160379" y="2815662"/>
-                  </a:lnTo>
-                  <a:lnTo>
-                    <a:pt x="4232002" y="2834388"/>
-                  </a:lnTo>
-                  <a:lnTo>
-                    <a:pt x="4303624" y="2852589"/>
-                  </a:lnTo>
-                  <a:lnTo>
-                    <a:pt x="4375247" y="2870280"/>
-                  </a:lnTo>
-                  <a:lnTo>
-                    <a:pt x="4446870" y="2887475"/>
-                  </a:lnTo>
-                  <a:lnTo>
-                    <a:pt x="4518492" y="2904188"/>
-                  </a:lnTo>
-                  <a:lnTo>
-                    <a:pt x="4590115" y="2920433"/>
-                  </a:lnTo>
-                  <a:lnTo>
-                    <a:pt x="4661737" y="2936222"/>
-                  </a:lnTo>
-                  <a:lnTo>
-                    <a:pt x="4733360" y="2951569"/>
-                  </a:lnTo>
-                  <a:lnTo>
-                    <a:pt x="4804982" y="2966486"/>
-                  </a:lnTo>
-                  <a:lnTo>
-                    <a:pt x="4876605" y="2980984"/>
-                  </a:lnTo>
-                  <a:lnTo>
-                    <a:pt x="4948227" y="2995076"/>
-                  </a:lnTo>
-                  <a:lnTo>
-                    <a:pt x="5019850" y="3008773"/>
-                  </a:lnTo>
-                  <a:lnTo>
-                    <a:pt x="5091472" y="3022087"/>
-                  </a:lnTo>
-                  <a:lnTo>
-                    <a:pt x="5163095" y="3035027"/>
-                  </a:lnTo>
-                  <a:lnTo>
-                    <a:pt x="5234717" y="3047604"/>
-                  </a:lnTo>
-                  <a:lnTo>
-                    <a:pt x="5306340" y="3059829"/>
-                  </a:lnTo>
-                  <a:lnTo>
-                    <a:pt x="5377962" y="3071711"/>
-                  </a:lnTo>
-                  <a:lnTo>
-                    <a:pt x="5449585" y="3083260"/>
-                  </a:lnTo>
-                  <a:lnTo>
-                    <a:pt x="5521207" y="3094486"/>
-                  </a:lnTo>
-                  <a:lnTo>
-                    <a:pt x="5592830" y="3105396"/>
-                  </a:lnTo>
-                  <a:lnTo>
-                    <a:pt x="5664452" y="3116001"/>
-                  </a:lnTo>
-                  <a:lnTo>
-                    <a:pt x="5736075" y="3126309"/>
-                  </a:lnTo>
-                  <a:lnTo>
-                    <a:pt x="5807698" y="3136328"/>
-                  </a:lnTo>
-                  <a:lnTo>
-                    <a:pt x="5879320" y="3146066"/>
-                  </a:lnTo>
-                  <a:lnTo>
-                    <a:pt x="5950943" y="3155531"/>
-                  </a:lnTo>
-                  <a:lnTo>
-                    <a:pt x="6022565" y="3164730"/>
-                  </a:lnTo>
-                  <a:lnTo>
-                    <a:pt x="6094188" y="3173672"/>
+                    <a:pt x="22561" y="31766"/>
+                  </a:lnTo>
+                  <a:lnTo>
+                    <a:pt x="94184" y="129749"/>
+                  </a:lnTo>
+                  <a:lnTo>
+                    <a:pt x="165806" y="224950"/>
+                  </a:lnTo>
+                  <a:lnTo>
+                    <a:pt x="237429" y="317448"/>
+                  </a:lnTo>
+                  <a:lnTo>
+                    <a:pt x="309051" y="407322"/>
+                  </a:lnTo>
+                  <a:lnTo>
+                    <a:pt x="380674" y="494644"/>
+                  </a:lnTo>
+                  <a:lnTo>
+                    <a:pt x="452296" y="579487"/>
+                  </a:lnTo>
+                  <a:lnTo>
+                    <a:pt x="523919" y="661923"/>
+                  </a:lnTo>
+                  <a:lnTo>
+                    <a:pt x="595541" y="742019"/>
+                  </a:lnTo>
+                  <a:lnTo>
+                    <a:pt x="667164" y="819841"/>
+                  </a:lnTo>
+                  <a:lnTo>
+                    <a:pt x="738786" y="895454"/>
+                  </a:lnTo>
+                  <a:lnTo>
+                    <a:pt x="810409" y="968921"/>
+                  </a:lnTo>
+                  <a:lnTo>
+                    <a:pt x="882032" y="1040302"/>
+                  </a:lnTo>
+                  <a:lnTo>
+                    <a:pt x="953654" y="1109658"/>
+                  </a:lnTo>
+                  <a:lnTo>
+                    <a:pt x="1025277" y="1177045"/>
+                  </a:lnTo>
+                  <a:lnTo>
+                    <a:pt x="1096899" y="1242519"/>
+                  </a:lnTo>
+                  <a:lnTo>
+                    <a:pt x="1168522" y="1306135"/>
+                  </a:lnTo>
+                  <a:lnTo>
+                    <a:pt x="1240144" y="1367945"/>
+                  </a:lnTo>
+                  <a:lnTo>
+                    <a:pt x="1311767" y="1428000"/>
+                  </a:lnTo>
+                  <a:lnTo>
+                    <a:pt x="1383389" y="1486351"/>
+                  </a:lnTo>
+                  <a:lnTo>
+                    <a:pt x="1455012" y="1543046"/>
+                  </a:lnTo>
+                  <a:lnTo>
+                    <a:pt x="1526634" y="1598132"/>
+                  </a:lnTo>
+                  <a:lnTo>
+                    <a:pt x="1598257" y="1651654"/>
+                  </a:lnTo>
+                  <a:lnTo>
+                    <a:pt x="1669879" y="1703656"/>
+                  </a:lnTo>
+                  <a:lnTo>
+                    <a:pt x="1741502" y="1754183"/>
+                  </a:lnTo>
+                  <a:lnTo>
+                    <a:pt x="1813124" y="1803275"/>
+                  </a:lnTo>
+                  <a:lnTo>
+                    <a:pt x="1884747" y="1850974"/>
+                  </a:lnTo>
+                  <a:lnTo>
+                    <a:pt x="1956369" y="1897320"/>
+                  </a:lnTo>
+                  <a:lnTo>
+                    <a:pt x="2027992" y="1942349"/>
+                  </a:lnTo>
+                  <a:lnTo>
+                    <a:pt x="2099614" y="1986101"/>
+                  </a:lnTo>
+                  <a:lnTo>
+                    <a:pt x="2171237" y="2028610"/>
+                  </a:lnTo>
+                  <a:lnTo>
+                    <a:pt x="2242860" y="2069914"/>
+                  </a:lnTo>
+                  <a:lnTo>
+                    <a:pt x="2314482" y="2110044"/>
+                  </a:lnTo>
+                  <a:lnTo>
+                    <a:pt x="2386105" y="2149036"/>
+                  </a:lnTo>
+                  <a:lnTo>
+                    <a:pt x="2457727" y="2186921"/>
+                  </a:lnTo>
+                  <a:lnTo>
+                    <a:pt x="2529350" y="2223730"/>
+                  </a:lnTo>
+                  <a:lnTo>
+                    <a:pt x="2600972" y="2259495"/>
+                  </a:lnTo>
+                  <a:lnTo>
+                    <a:pt x="2672595" y="2294245"/>
+                  </a:lnTo>
+                  <a:lnTo>
+                    <a:pt x="2744217" y="2328008"/>
+                  </a:lnTo>
+                  <a:lnTo>
+                    <a:pt x="2815840" y="2360813"/>
+                  </a:lnTo>
+                  <a:lnTo>
+                    <a:pt x="2887462" y="2392686"/>
+                  </a:lnTo>
+                  <a:lnTo>
+                    <a:pt x="2959085" y="2423655"/>
+                  </a:lnTo>
+                  <a:lnTo>
+                    <a:pt x="3030707" y="2453745"/>
+                  </a:lnTo>
+                  <a:lnTo>
+                    <a:pt x="3102330" y="2482981"/>
+                  </a:lnTo>
+                  <a:lnTo>
+                    <a:pt x="3173952" y="2511387"/>
+                  </a:lnTo>
+                  <a:lnTo>
+                    <a:pt x="3245575" y="2538987"/>
+                  </a:lnTo>
+                  <a:lnTo>
+                    <a:pt x="3317197" y="2565803"/>
+                  </a:lnTo>
+                  <a:lnTo>
+                    <a:pt x="3388820" y="2591859"/>
+                  </a:lnTo>
+                  <a:lnTo>
+                    <a:pt x="3460442" y="2617174"/>
+                  </a:lnTo>
+                  <a:lnTo>
+                    <a:pt x="3532065" y="2641771"/>
+                  </a:lnTo>
+                  <a:lnTo>
+                    <a:pt x="3603688" y="2665670"/>
+                  </a:lnTo>
+                  <a:lnTo>
+                    <a:pt x="3675310" y="2688891"/>
+                  </a:lnTo>
+                  <a:lnTo>
+                    <a:pt x="3746933" y="2711452"/>
+                  </a:lnTo>
+                  <a:lnTo>
+                    <a:pt x="3818555" y="2733373"/>
+                  </a:lnTo>
+                  <a:lnTo>
+                    <a:pt x="3890178" y="2754672"/>
+                  </a:lnTo>
+                  <a:lnTo>
+                    <a:pt x="3961800" y="2775366"/>
+                  </a:lnTo>
+                  <a:lnTo>
+                    <a:pt x="4033423" y="2795473"/>
+                  </a:lnTo>
+                  <a:lnTo>
+                    <a:pt x="4105045" y="2815009"/>
+                  </a:lnTo>
+                  <a:lnTo>
+                    <a:pt x="4176668" y="2833991"/>
+                  </a:lnTo>
+                  <a:lnTo>
+                    <a:pt x="4248290" y="2852434"/>
+                  </a:lnTo>
+                  <a:lnTo>
+                    <a:pt x="4319913" y="2870353"/>
+                  </a:lnTo>
+                  <a:lnTo>
+                    <a:pt x="4391535" y="2887764"/>
+                  </a:lnTo>
+                  <a:lnTo>
+                    <a:pt x="4463158" y="2904681"/>
+                  </a:lnTo>
+                  <a:lnTo>
+                    <a:pt x="4534780" y="2921117"/>
+                  </a:lnTo>
+                  <a:lnTo>
+                    <a:pt x="4606403" y="2937087"/>
+                  </a:lnTo>
+                  <a:lnTo>
+                    <a:pt x="4678025" y="2952603"/>
+                  </a:lnTo>
+                  <a:lnTo>
+                    <a:pt x="4749648" y="2967680"/>
+                  </a:lnTo>
+                  <a:lnTo>
+                    <a:pt x="4821270" y="2982328"/>
+                  </a:lnTo>
+                  <a:lnTo>
+                    <a:pt x="4892893" y="2996560"/>
+                  </a:lnTo>
+                  <a:lnTo>
+                    <a:pt x="4964516" y="3010389"/>
+                  </a:lnTo>
+                  <a:lnTo>
+                    <a:pt x="5036138" y="3023825"/>
+                  </a:lnTo>
+                  <a:lnTo>
+                    <a:pt x="5107761" y="3036879"/>
+                  </a:lnTo>
+                  <a:lnTo>
+                    <a:pt x="5179383" y="3049563"/>
+                  </a:lnTo>
+                  <a:lnTo>
+                    <a:pt x="5251006" y="3061887"/>
+                  </a:lnTo>
+                  <a:lnTo>
+                    <a:pt x="5322628" y="3073861"/>
+                  </a:lnTo>
+                  <a:lnTo>
+                    <a:pt x="5394251" y="3085496"/>
+                  </a:lnTo>
+                  <a:lnTo>
+                    <a:pt x="5465873" y="3096800"/>
+                  </a:lnTo>
+                  <a:lnTo>
+                    <a:pt x="5537496" y="3107783"/>
+                  </a:lnTo>
+                  <a:lnTo>
+                    <a:pt x="5609118" y="3118455"/>
+                  </a:lnTo>
+                  <a:lnTo>
+                    <a:pt x="5680741" y="3128823"/>
+                  </a:lnTo>
+                  <a:lnTo>
+                    <a:pt x="5752363" y="3138897"/>
+                  </a:lnTo>
+                  <a:lnTo>
+                    <a:pt x="5823986" y="3148686"/>
+                  </a:lnTo>
+                  <a:lnTo>
+                    <a:pt x="5895608" y="3158196"/>
+                  </a:lnTo>
+                  <a:lnTo>
+                    <a:pt x="5967231" y="3167437"/>
+                  </a:lnTo>
+                  <a:lnTo>
+                    <a:pt x="6038853" y="3176415"/>
                   </a:lnTo>
                 </a:path>
               </a:pathLst>
@@ -4337,7 +4334,7 @@
           </p:nvSpPr>
           <p:spPr>
             <a:xfrm>
-              <a:off x="5783789" y="2073503"/>
+              <a:off x="5793129" y="2073503"/>
               <a:ext cx="0" cy="3649639"/>
             </a:xfrm>
             <a:custGeom>
@@ -4380,7 +4377,7 @@
           </p:nvSpPr>
           <p:spPr>
             <a:xfrm>
-              <a:off x="4658599" y="2073503"/>
+              <a:off x="4667548" y="2073503"/>
               <a:ext cx="0" cy="3649639"/>
             </a:xfrm>
             <a:custGeom>
@@ -4423,7 +4420,7 @@
           </p:nvSpPr>
           <p:spPr>
             <a:xfrm>
-              <a:off x="6864197" y="2073503"/>
+              <a:off x="6868063" y="2073503"/>
               <a:ext cx="0" cy="3649639"/>
             </a:xfrm>
             <a:custGeom>
@@ -4696,7 +4693,7 @@
           </p:nvSpPr>
           <p:spPr>
             <a:xfrm>
-              <a:off x="3120823" y="5785772"/>
+              <a:off x="3120990" y="5785772"/>
               <a:ext cx="161574" cy="80101"/>
             </a:xfrm>
             <a:prstGeom prst="rect">
@@ -4742,7 +4739,7 @@
           </p:nvSpPr>
           <p:spPr>
             <a:xfrm>
-              <a:off x="5688698" y="5785772"/>
+              <a:off x="5688107" y="5785772"/>
               <a:ext cx="62179" cy="80101"/>
             </a:xfrm>
             <a:prstGeom prst="rect">
@@ -4788,7 +4785,7 @@
           </p:nvSpPr>
           <p:spPr>
             <a:xfrm>
-              <a:off x="8175787" y="5785772"/>
+              <a:off x="8174437" y="5785772"/>
               <a:ext cx="124358" cy="80101"/>
             </a:xfrm>
             <a:prstGeom prst="rect">
@@ -4959,7 +4956,7 @@
                   <a:latin typeface="Helvetica"/>
                   <a:cs typeface="Helvetica"/>
                 </a:rPr>
-                <a:t>subHR per 10 mL/min decline: 1.49 (1.17-1.90), p_Bonf = 0.008 (n = 6)  |  per IQR decline (Δ = 21.9): 2.40 (1.41-4.10)  |  IQR: [-10.5, 11.4]</a:t>
+                <a:t>subHR per 10 mL/min decline: 1.50 (1.17-1.92), p_Bonf = 0.008 (n = 6)  |  per IQR decline (Δ = 21.9): 2.42 (1.42-4.15)  |  IQR: [-10.4, 11.4]</a:t>
               </a:r>
             </a:p>
           </p:txBody>
